--- a/examples/transaction_monitoring/output/final/delivery_package.pptx
+++ b/examples/transaction_monitoring/output/final/delivery_package.pptx
@@ -5130,7 +5130,7 @@
                 <a:ea typeface="Courier New" pitchFamily="34" charset="-122"/>
                 <a:cs typeface="Courier New" pitchFamily="34" charset="-120"/>
               </a:rPr>
-              <a:t>ops_review findings:  aa5d2eb5f24f42767e9ac2d5...</a:t>
+              <a:t>ops_review findings:  5ba482894b474b5dc7870877...</a:t>
             </a:r>
             <a:endParaRPr lang="en-US" sz="1300" dirty="0"/>
           </a:p>

--- a/examples/transaction_monitoring/output/final/delivery_package.pptx
+++ b/examples/transaction_monitoring/output/final/delivery_package.pptx
@@ -5130,7 +5130,7 @@
                 <a:ea typeface="Courier New" pitchFamily="34" charset="-122"/>
                 <a:cs typeface="Courier New" pitchFamily="34" charset="-120"/>
               </a:rPr>
-              <a:t>ops_review findings:  5ba482894b474b5dc7870877...</a:t>
+              <a:t>ops_review findings:  ece72a6b3b19018f284fcc37...</a:t>
             </a:r>
             <a:endParaRPr lang="en-US" sz="1300" dirty="0"/>
           </a:p>
